--- a/overview.pptx
+++ b/overview.pptx
@@ -3838,6 +3838,12 @@
           <a:prstGeom prst="rect">
             <a:avLst/>
           </a:prstGeom>
+          <a:solidFill>
+            <a:schemeClr val="tx2">
+              <a:lumMod val="60000"/>
+              <a:lumOff val="40000"/>
+            </a:schemeClr>
+          </a:solidFill>
           <a:ln>
             <a:solidFill>
               <a:schemeClr val="tx1"/>
@@ -3879,7 +3885,7 @@
                 <a:ea typeface="Meiryo UI" panose="020B0604030504040204" pitchFamily="50" charset="-128"/>
                 <a:cs typeface="Arial" panose="020B0604020202020204" pitchFamily="34" charset="0"/>
               </a:rPr>
-              <a:t>vory.callback.trainer.Trainer</a:t>
+              <a:t>vory.callbacks.trainer.Trainer</a:t>
             </a:r>
             <a:endParaRPr kumimoji="1" lang="ja-JP" altLang="en-US">
               <a:latin typeface="Meiryo UI" panose="020B0604030504040204" pitchFamily="50" charset="-128"/>
@@ -4271,6 +4277,12 @@
           <a:prstGeom prst="rect">
             <a:avLst/>
           </a:prstGeom>
+          <a:solidFill>
+            <a:schemeClr val="tx2">
+              <a:lumMod val="60000"/>
+              <a:lumOff val="40000"/>
+            </a:schemeClr>
+          </a:solidFill>
           <a:ln>
             <a:solidFill>
               <a:schemeClr val="tx1"/>
@@ -4312,7 +4324,7 @@
                 <a:ea typeface="Meiryo UI" panose="020B0604030504040204" pitchFamily="50" charset="-128"/>
                 <a:cs typeface="Arial" panose="020B0604020202020204" pitchFamily="34" charset="0"/>
               </a:rPr>
-              <a:t>vory.callback.metrics.Metrics</a:t>
+              <a:t>vory.callbacks.metrics.Metrics</a:t>
             </a:r>
             <a:endParaRPr kumimoji="1" lang="ja-JP" altLang="en-US">
               <a:latin typeface="Meiryo UI" panose="020B0604030504040204" pitchFamily="50" charset="-128"/>
@@ -4342,6 +4354,12 @@
           <a:prstGeom prst="rect">
             <a:avLst/>
           </a:prstGeom>
+          <a:solidFill>
+            <a:schemeClr val="tx2">
+              <a:lumMod val="60000"/>
+              <a:lumOff val="40000"/>
+            </a:schemeClr>
+          </a:solidFill>
           <a:ln>
             <a:solidFill>
               <a:schemeClr val="tx1"/>
@@ -4383,7 +4401,7 @@
                 <a:ea typeface="Meiryo UI" panose="020B0604030504040204" pitchFamily="50" charset="-128"/>
                 <a:cs typeface="Arial" panose="020B0604020202020204" pitchFamily="34" charset="0"/>
               </a:rPr>
-              <a:t>vory.callback.result.Results</a:t>
+              <a:t>vory.callbacks.result.Results</a:t>
             </a:r>
             <a:endParaRPr kumimoji="1" lang="ja-JP" altLang="en-US">
               <a:latin typeface="Meiryo UI" panose="020B0604030504040204" pitchFamily="50" charset="-128"/>
@@ -4413,6 +4431,12 @@
           <a:prstGeom prst="rect">
             <a:avLst/>
           </a:prstGeom>
+          <a:solidFill>
+            <a:schemeClr val="tx2">
+              <a:lumMod val="60000"/>
+              <a:lumOff val="40000"/>
+            </a:schemeClr>
+          </a:solidFill>
           <a:ln>
             <a:solidFill>
               <a:schemeClr val="tx1"/>
@@ -4454,7 +4478,7 @@
                 <a:ea typeface="Meiryo UI" panose="020B0604030504040204" pitchFamily="50" charset="-128"/>
                 <a:cs typeface="Arial" panose="020B0604020202020204" pitchFamily="34" charset="0"/>
               </a:rPr>
-              <a:t>vory.callback.pruning.Pruning</a:t>
+              <a:t>vory.callbacks.pruning.Pruning</a:t>
             </a:r>
             <a:endParaRPr kumimoji="1" lang="ja-JP" altLang="en-US">
               <a:latin typeface="Meiryo UI" panose="020B0604030504040204" pitchFamily="50" charset="-128"/>
@@ -4484,6 +4508,12 @@
           <a:prstGeom prst="rect">
             <a:avLst/>
           </a:prstGeom>
+          <a:solidFill>
+            <a:schemeClr val="tx2">
+              <a:lumMod val="60000"/>
+              <a:lumOff val="40000"/>
+            </a:schemeClr>
+          </a:solidFill>
           <a:ln>
             <a:solidFill>
               <a:schemeClr val="tx1"/>
@@ -4525,7 +4555,7 @@
                 <a:ea typeface="Meiryo UI" panose="020B0604030504040204" pitchFamily="50" charset="-128"/>
                 <a:cs typeface="Arial" panose="020B0604020202020204" pitchFamily="34" charset="0"/>
               </a:rPr>
-              <a:t>vory.callback.early_stopping.EarlyStopping</a:t>
+              <a:t>vory.callbacks.early_stopping.EarlyStopping</a:t>
             </a:r>
             <a:endParaRPr kumimoji="1" lang="ja-JP" altLang="en-US">
               <a:latin typeface="Meiryo UI" panose="020B0604030504040204" pitchFamily="50" charset="-128"/>
@@ -4555,6 +4585,12 @@
           <a:prstGeom prst="rect">
             <a:avLst/>
           </a:prstGeom>
+          <a:solidFill>
+            <a:schemeClr val="tx2">
+              <a:lumMod val="60000"/>
+              <a:lumOff val="40000"/>
+            </a:schemeClr>
+          </a:solidFill>
           <a:ln>
             <a:solidFill>
               <a:schemeClr val="tx1"/>
@@ -4596,7 +4632,7 @@
                 <a:ea typeface="Meiryo UI" panose="020B0604030504040204" pitchFamily="50" charset="-128"/>
                 <a:cs typeface="Arial" panose="020B0604020202020204" pitchFamily="34" charset="0"/>
               </a:rPr>
-              <a:t>vory.callback.tracking.Tracking</a:t>
+              <a:t>vory.callbacks.tracking.Tracking</a:t>
             </a:r>
             <a:endParaRPr kumimoji="1" lang="ja-JP" altLang="en-US">
               <a:latin typeface="Meiryo UI" panose="020B0604030504040204" pitchFamily="50" charset="-128"/>
@@ -4626,6 +4662,12 @@
           <a:prstGeom prst="rect">
             <a:avLst/>
           </a:prstGeom>
+          <a:solidFill>
+            <a:schemeClr val="tx2">
+              <a:lumMod val="60000"/>
+              <a:lumOff val="40000"/>
+            </a:schemeClr>
+          </a:solidFill>
           <a:ln>
             <a:solidFill>
               <a:schemeClr val="tx1"/>
@@ -4667,7 +4709,7 @@
                 <a:ea typeface="Meiryo UI" panose="020B0604030504040204" pitchFamily="50" charset="-128"/>
                 <a:cs typeface="Arial" panose="020B0604020202020204" pitchFamily="34" charset="0"/>
               </a:rPr>
-              <a:t>vory.callback.monitor.Monitor</a:t>
+              <a:t>vory.callbacks.monitor.Monitor</a:t>
             </a:r>
             <a:endParaRPr kumimoji="1" lang="ja-JP" altLang="en-US">
               <a:latin typeface="Meiryo UI" panose="020B0604030504040204" pitchFamily="50" charset="-128"/>
